--- a/slides/00_course_intro.pptx
+++ b/slides/00_course_intro.pptx
@@ -3372,7 +3372,7 @@
           <a:p>
             <a:fld id="{3E22BF2E-04DA-469E-97C5-BB68A0368813}" type="datetimeFigureOut">
               <a:rPr lang="en-US" smtClean="0"/>
-              <a:t>8/26/2026</a:t>
+              <a:t>10/16/2026</a:t>
             </a:fld>
             <a:endParaRPr lang="en-US"/>
           </a:p>
@@ -3570,7 +3570,7 @@
           <a:p>
             <a:fld id="{3E22BF2E-04DA-469E-97C5-BB68A0368813}" type="datetimeFigureOut">
               <a:rPr lang="en-US" smtClean="0"/>
-              <a:t>8/26/2026</a:t>
+              <a:t>10/16/2026</a:t>
             </a:fld>
             <a:endParaRPr lang="en-US"/>
           </a:p>
@@ -3778,7 +3778,7 @@
           <a:p>
             <a:fld id="{3E22BF2E-04DA-469E-97C5-BB68A0368813}" type="datetimeFigureOut">
               <a:rPr lang="en-US" smtClean="0"/>
-              <a:t>8/26/2026</a:t>
+              <a:t>10/16/2026</a:t>
             </a:fld>
             <a:endParaRPr lang="en-US"/>
           </a:p>
@@ -3986,7 +3986,7 @@
           <a:p>
             <a:fld id="{3E22BF2E-04DA-469E-97C5-BB68A0368813}" type="datetimeFigureOut">
               <a:rPr lang="en-US" smtClean="0"/>
-              <a:t>8/26/2026</a:t>
+              <a:t>10/16/2026</a:t>
             </a:fld>
             <a:endParaRPr lang="en-US"/>
           </a:p>
@@ -4261,7 +4261,7 @@
           <a:p>
             <a:fld id="{3E22BF2E-04DA-469E-97C5-BB68A0368813}" type="datetimeFigureOut">
               <a:rPr lang="en-US" smtClean="0"/>
-              <a:t>8/26/2026</a:t>
+              <a:t>10/16/2026</a:t>
             </a:fld>
             <a:endParaRPr lang="en-US"/>
           </a:p>
@@ -4526,7 +4526,7 @@
           <a:p>
             <a:fld id="{3E22BF2E-04DA-469E-97C5-BB68A0368813}" type="datetimeFigureOut">
               <a:rPr lang="en-US" smtClean="0"/>
-              <a:t>8/26/2026</a:t>
+              <a:t>10/16/2026</a:t>
             </a:fld>
             <a:endParaRPr lang="en-US"/>
           </a:p>
@@ -4938,7 +4938,7 @@
           <a:p>
             <a:fld id="{3E22BF2E-04DA-469E-97C5-BB68A0368813}" type="datetimeFigureOut">
               <a:rPr lang="en-US" smtClean="0"/>
-              <a:t>8/26/2026</a:t>
+              <a:t>10/16/2026</a:t>
             </a:fld>
             <a:endParaRPr lang="en-US"/>
           </a:p>
@@ -5079,7 +5079,7 @@
           <a:p>
             <a:fld id="{3E22BF2E-04DA-469E-97C5-BB68A0368813}" type="datetimeFigureOut">
               <a:rPr lang="en-US" smtClean="0"/>
-              <a:t>8/26/2026</a:t>
+              <a:t>10/16/2026</a:t>
             </a:fld>
             <a:endParaRPr lang="en-US"/>
           </a:p>
@@ -5192,7 +5192,7 @@
           <a:p>
             <a:fld id="{3E22BF2E-04DA-469E-97C5-BB68A0368813}" type="datetimeFigureOut">
               <a:rPr lang="en-US" smtClean="0"/>
-              <a:t>8/26/2026</a:t>
+              <a:t>10/16/2026</a:t>
             </a:fld>
             <a:endParaRPr lang="en-US"/>
           </a:p>
@@ -5503,7 +5503,7 @@
           <a:p>
             <a:fld id="{3E22BF2E-04DA-469E-97C5-BB68A0368813}" type="datetimeFigureOut">
               <a:rPr lang="en-US" smtClean="0"/>
-              <a:t>8/26/2026</a:t>
+              <a:t>10/16/2026</a:t>
             </a:fld>
             <a:endParaRPr lang="en-US"/>
           </a:p>
@@ -5791,7 +5791,7 @@
           <a:p>
             <a:fld id="{3E22BF2E-04DA-469E-97C5-BB68A0368813}" type="datetimeFigureOut">
               <a:rPr lang="en-US" smtClean="0"/>
-              <a:t>8/26/2026</a:t>
+              <a:t>10/16/2026</a:t>
             </a:fld>
             <a:endParaRPr lang="en-US"/>
           </a:p>
@@ -6032,7 +6032,7 @@
           <a:p>
             <a:fld id="{3E22BF2E-04DA-469E-97C5-BB68A0368813}" type="datetimeFigureOut">
               <a:rPr lang="en-US" smtClean="0"/>
-              <a:t>8/26/2026</a:t>
+              <a:t>10/16/2026</a:t>
             </a:fld>
             <a:endParaRPr lang="en-US"/>
           </a:p>
@@ -6919,6 +6919,9 @@
               <a:ext uri="{FF2B5EF4-FFF2-40B4-BE49-F238E27FC236}">
                 <a16:creationId xmlns:a16="http://schemas.microsoft.com/office/drawing/2014/main" id="{3CBD6548-3D4E-9A40-CA35-355261D4E92C}"/>
               </a:ext>
+              <a:ext uri="{C183D7F6-B498-43B3-948B-1728B52AA6E4}">
+                <adec:decorative xmlns:adec="http://schemas.microsoft.com/office/drawing/2017/decorative" val="1"/>
+              </a:ext>
             </a:extLst>
           </p:cNvPr>
           <p:cNvPicPr/>
@@ -6946,6 +6949,9 @@
             <a:extLst>
               <a:ext uri="{FF2B5EF4-FFF2-40B4-BE49-F238E27FC236}">
                 <a16:creationId xmlns:a16="http://schemas.microsoft.com/office/drawing/2014/main" id="{FDD561C6-F6BB-6A53-51AF-DB34820E51CD}"/>
+              </a:ext>
+              <a:ext uri="{C183D7F6-B498-43B3-948B-1728B52AA6E4}">
+                <adec:decorative xmlns:adec="http://schemas.microsoft.com/office/drawing/2017/decorative" val="1"/>
               </a:ext>
             </a:extLst>
           </p:cNvPr>
@@ -6993,6 +6999,9 @@
             <a:extLst>
               <a:ext uri="{FF2B5EF4-FFF2-40B4-BE49-F238E27FC236}">
                 <a16:creationId xmlns:a16="http://schemas.microsoft.com/office/drawing/2014/main" id="{DA1C6744-BD97-2C10-F393-A0B726F71E7A}"/>
+              </a:ext>
+              <a:ext uri="{C183D7F6-B498-43B3-948B-1728B52AA6E4}">
+                <adec:decorative xmlns:adec="http://schemas.microsoft.com/office/drawing/2017/decorative" val="1"/>
               </a:ext>
             </a:extLst>
           </p:cNvPr>
@@ -7384,6 +7393,9 @@
             <a:extLst>
               <a:ext uri="{FF2B5EF4-FFF2-40B4-BE49-F238E27FC236}">
                 <a16:creationId xmlns:a16="http://schemas.microsoft.com/office/drawing/2014/main" id="{DABC4552-96C8-7A2C-5EFF-96517B550E13}"/>
+              </a:ext>
+              <a:ext uri="{C183D7F6-B498-43B3-948B-1728B52AA6E4}">
+                <adec:decorative xmlns:adec="http://schemas.microsoft.com/office/drawing/2017/decorative" val="1"/>
               </a:ext>
             </a:extLst>
           </p:cNvPr>
